--- a/server/templates/MediaBuzz_Master_Template.pptx
+++ b/server/templates/MediaBuzz_Master_Template.pptx
@@ -1965,7 +1965,7 @@
                 <a:ea typeface="Arial" pitchFamily="34" charset="-122"/>
                 <a:cs typeface="Arial" pitchFamily="34" charset="-120"/>
               </a:rPr>
-              <a:t>Booked till 30 Sept 2026</a:t>
+              <a:t>Available</a:t>
             </a:r>
             <a:endParaRPr lang="en-US" sz="1450" dirty="0"/>
           </a:p>
